--- a/samples/2026-10/The_Vibe_Coding_Playbook 2610.pptx
+++ b/samples/2026-10/The_Vibe_Coding_Playbook 2610.pptx
@@ -4125,10 +4125,10 @@
       </p:grpSpPr>
       <p:pic>
         <p:nvPicPr>
-          <p:cNvPr id="4" name="圖片 3">
+          <p:cNvPr id="3" name="圖片 2">
             <a:extLst>
               <a:ext uri="{FF2B5EF4-FFF2-40B4-BE49-F238E27FC236}">
-                <a16:creationId xmlns:a16="http://schemas.microsoft.com/office/drawing/2014/main" id="{F071C5A0-FA0F-607B-A4FB-E7AAB5525325}"/>
+                <a16:creationId xmlns:a16="http://schemas.microsoft.com/office/drawing/2014/main" id="{A9C1BF20-6E2C-1C1F-0DA9-2ABA4DA1CE16}"/>
               </a:ext>
             </a:extLst>
           </p:cNvPr>
@@ -4138,21 +4138,15 @@
           <p:nvPr/>
         </p:nvPicPr>
         <p:blipFill>
-          <a:blip r:embed="rId3">
-            <a:extLst>
-              <a:ext uri="{28A0092B-C50C-407E-A947-70E740481C1C}">
-                <a14:useLocalDpi xmlns:a14="http://schemas.microsoft.com/office/drawing/2010/main" val="0"/>
-              </a:ext>
-            </a:extLst>
-          </a:blip>
+          <a:blip r:embed="rId3"/>
           <a:stretch>
             <a:fillRect/>
           </a:stretch>
         </p:blipFill>
         <p:spPr>
           <a:xfrm>
-            <a:off x="2041" y="32704"/>
-            <a:ext cx="16251918" cy="9078592"/>
+            <a:off x="3175" y="33337"/>
+            <a:ext cx="16249650" cy="9077325"/>
           </a:xfrm>
           <a:prstGeom prst="rect">
             <a:avLst/>
